--- a/docs/deck3/nekonote_VORN2026.pptx
+++ b/docs/deck3/nekonote_VORN2026.pptx
@@ -2555,7 +2555,7 @@
                 <a:ea typeface="Meiryo" pitchFamily="34" charset="-122"/>
                 <a:cs typeface="Meiryo" pitchFamily="34" charset="-120"/>
               </a:rPr>
-              <a:t>猫を世話する人の書類と期限を、</a:t>
+              <a:t>猫を見守る人の書類作成と期限管理を、</a:t>
             </a:r>
             <a:endParaRPr lang="en-US" sz="3200" dirty="0"/>
           </a:p>
@@ -2575,7 +2575,7 @@
                 <a:ea typeface="Meiryo" pitchFamily="34" charset="-122"/>
                 <a:cs typeface="Meiryo" pitchFamily="34" charset="-120"/>
               </a:rPr>
-              <a:t>AIが引き受ける。</a:t>
+              <a:t>AIがサポートする。</a:t>
             </a:r>
             <a:endParaRPr lang="en-US" sz="3200" dirty="0"/>
           </a:p>
@@ -2747,7 +2747,7 @@
                 <a:ea typeface="Meiryo" pitchFamily="34" charset="-122"/>
                 <a:cs typeface="Meiryo" pitchFamily="34" charset="-120"/>
               </a:rPr>
-              <a:t>市民面：開くと「次にやること」が出る</a:t>
+              <a:t>市民向け画面：開くだけで「いま次に行うべきこと」を提示</a:t>
             </a:r>
             <a:endParaRPr lang="en-US" sz="950" dirty="0"/>
           </a:p>
@@ -2888,7 +2888,7 @@
                 <a:ea typeface="Meiryo" pitchFamily="34" charset="-122"/>
                 <a:cs typeface="Meiryo" pitchFamily="34" charset="-120"/>
               </a:rPr>
-              <a:t>ボランティアは要綱を読まない。場所と頭数を話すだけ。</a:t>
+              <a:t>要綱の読み込みは不要、活動場所と頭数を伝えるだけで手続きが進行</a:t>
             </a:r>
             <a:endParaRPr lang="en-US" sz="2400" dirty="0"/>
           </a:p>
@@ -2910,7 +2910,7 @@
         <p:spPr>
           <a:xfrm>
             <a:off x="685800" y="1325880"/>
-            <a:ext cx="910" cy="859"/>
+            <a:ext cx="910" cy="404"/>
           </a:xfrm>
           <a:prstGeom prst="rect">
             <a:avLst/>
@@ -2926,7 +2926,7 @@
         <p:spPr>
           <a:xfrm>
             <a:off x="685800" y="1325880"/>
-            <a:ext cx="4937760" cy="4663440"/>
+            <a:ext cx="4937760" cy="2194560"/>
           </a:xfrm>
           <a:prstGeom prst="rect">
             <a:avLst/>
@@ -2939,9 +2939,55 @@
           </a:ln>
         </p:spPr>
       </p:sp>
-      <p:sp>
-        <p:nvSpPr>
-          <p:cNvPr id="5" name="Shape 2"/>
+      <p:pic>
+        <p:nvPicPr>
+          <p:cNvPr id="5" name="Image 1" descr="/home/user/VORN/docs/deck3/chat2.jpg">    </p:cNvPr>
+          <p:cNvPicPr>
+            <a:picLocks noChangeAspect="1"/>
+          </p:cNvPicPr>
+          <p:nvPr/>
+        </p:nvPicPr>
+        <p:blipFill>
+          <a:blip r:embed="rId2"/>
+          <a:stretch>
+            <a:fillRect/>
+          </a:stretch>
+        </p:blipFill>
+        <p:spPr>
+          <a:xfrm>
+            <a:off x="685800" y="3657600"/>
+            <a:ext cx="4937760" cy="914400"/>
+          </a:xfrm>
+          <a:prstGeom prst="rect">
+            <a:avLst/>
+          </a:prstGeom>
+        </p:spPr>
+      </p:pic>
+      <p:sp>
+        <p:nvSpPr>
+          <p:cNvPr id="6" name="Shape 2"/>
+          <p:cNvSpPr/>
+          <p:nvPr/>
+        </p:nvSpPr>
+        <p:spPr>
+          <a:xfrm>
+            <a:off x="685800" y="3657600"/>
+            <a:ext cx="4937760" cy="2441448"/>
+          </a:xfrm>
+          <a:prstGeom prst="rect">
+            <a:avLst/>
+          </a:prstGeom>
+          <a:ln w="9525">
+            <a:solidFill>
+              <a:srgbClr val="D5DBE1"/>
+            </a:solidFill>
+            <a:prstDash val="solid"/>
+          </a:ln>
+        </p:spPr>
+      </p:sp>
+      <p:sp>
+        <p:nvSpPr>
+          <p:cNvPr id="7" name="Shape 3"/>
           <p:cNvSpPr/>
           <p:nvPr/>
         </p:nvSpPr>
@@ -2975,7 +3021,7 @@
       </p:sp>
       <p:sp>
         <p:nvSpPr>
-          <p:cNvPr id="6" name="Text 3"/>
+          <p:cNvPr id="8" name="Text 4"/>
           <p:cNvSpPr txBox="1"/>
           <p:nvPr/>
         </p:nvSpPr>
@@ -3009,7 +3055,7 @@
                 <a:ea typeface="Meiryo" pitchFamily="34" charset="-122"/>
                 <a:cs typeface="Meiryo" pitchFamily="34" charset="-120"/>
               </a:rPr>
-              <a:t>「11頭くらい、3人でやります」と話すと、AIが要綱第2条を引いて「11頭なので京都市民3名以上」と返し、次に聞くべき項目（餌場・トイレ・町内会）へ進む。</a:t>
+              <a:t>町内会の同意を伝えると記録し、続けて「頭数が11頭（10頭以上）なので、同一世帯でない地域住民2名を含む京都市民3名以上が必要」と要綱第2条⑵の条件を返してから、活動者の入力へ進む。</a:t>
             </a:r>
             <a:endParaRPr lang="en-US" sz="1100" dirty="0"/>
           </a:p>
@@ -3017,7 +3063,7 @@
       </p:sp>
       <p:sp>
         <p:nvSpPr>
-          <p:cNvPr id="7" name="Text 4"/>
+          <p:cNvPr id="9" name="Text 5"/>
           <p:cNvSpPr txBox="1"/>
           <p:nvPr/>
         </p:nvSpPr>
@@ -3080,7 +3126,7 @@
                 <a:ea typeface="Meiryo" pitchFamily="34" charset="-122"/>
                 <a:cs typeface="Meiryo" pitchFamily="34" charset="-120"/>
               </a:rPr>
-              <a:t>捕獲の手順・自治会の説得・里親探し・子猫の育て方を聞かれると「範囲外」と断る。</a:t>
+              <a:t>捕獲手順や自治会折衝、里親探しなどの相談には踏み込まず、事務手続きの支援に特化する安全設計。</a:t>
             </a:r>
             <a:endParaRPr lang="en-US" sz="1200" dirty="0"/>
           </a:p>
@@ -3088,7 +3134,7 @@
       </p:sp>
       <p:sp>
         <p:nvSpPr>
-          <p:cNvPr id="8" name="Text 5"/>
+          <p:cNvPr id="10" name="Text 6"/>
           <p:cNvSpPr txBox="1"/>
           <p:nvPr/>
         </p:nvSpPr>
@@ -3119,7 +3165,7 @@
                 <a:ea typeface="Meiryo" pitchFamily="34" charset="-122"/>
                 <a:cs typeface="Meiryo" pitchFamily="34" charset="-120"/>
               </a:rPr>
-              <a:t>画面はプロトタイプ。デモ用の架空コロニー（左京区・11頭・活動者3名）</a:t>
+              <a:t>画面はプロトタイプ。デモ用の架空コロニー（左京区・11頭・活動者3名）。会話の応答はモック。</a:t>
             </a:r>
             <a:endParaRPr lang="en-US" sz="800" dirty="0"/>
           </a:p>
@@ -3127,7 +3173,7 @@
       </p:sp>
       <p:sp>
         <p:nvSpPr>
-          <p:cNvPr id="9" name="Text 6"/>
+          <p:cNvPr id="11" name="Text 7"/>
           <p:cNvSpPr txBox="1"/>
           <p:nvPr/>
         </p:nvSpPr>
@@ -3232,7 +3278,7 @@
                 <a:ea typeface="Meiryo" pitchFamily="34" charset="-122"/>
                 <a:cs typeface="Meiryo" pitchFamily="34" charset="-120"/>
               </a:rPr>
-              <a:t>出す前に不足が条文付きで分かり、開くと次にやることが1つ出る。</a:t>
+              <a:t>提出前に不足要件を根拠条文付きで可視化、画面を開くだけで次のタスクを提示</a:t>
             </a:r>
             <a:endParaRPr lang="en-US" sz="2400" dirty="0"/>
           </a:p>
@@ -3248,13 +3294,14 @@
         </p:nvPicPr>
         <p:blipFill>
           <a:blip r:embed="rId1"/>
-          <a:srcRect l="0" r="99980" t="0" b="99980"/>
-          <a:stretch/>
+          <a:stretch>
+            <a:fillRect/>
+          </a:stretch>
         </p:blipFill>
         <p:spPr>
           <a:xfrm>
             <a:off x="685800" y="1325880"/>
-            <a:ext cx="1077" cy="803"/>
+            <a:ext cx="5394960" cy="914400"/>
           </a:xfrm>
           <a:prstGeom prst="rect">
             <a:avLst/>
@@ -3270,7 +3317,7 @@
         <p:spPr>
           <a:xfrm>
             <a:off x="685800" y="1325880"/>
-            <a:ext cx="5394960" cy="4023360"/>
+            <a:ext cx="5394960" cy="3094395"/>
           </a:xfrm>
           <a:prstGeom prst="rect">
             <a:avLst/>
@@ -3319,7 +3366,7 @@
                 <a:ea typeface="Meiryo" pitchFamily="34" charset="-122"/>
                 <a:cs typeface="Meiryo" pitchFamily="34" charset="-120"/>
               </a:rPr>
-              <a:t>判定。「周辺地図は別途添付」は要綱第5条、「登録後に第4号様式」は第9条から。13件の規則に出典と引用が付く。</a:t>
+              <a:t>判定。「周辺地図は別途添付」は要綱第5条、「登録後に第4号様式」は第9条から。規則ごとに出典と引用が付く。</a:t>
             </a:r>
             <a:endParaRPr lang="en-US" sz="950" dirty="0"/>
           </a:p>
@@ -3552,7 +3599,7 @@
                 <a:ea typeface="Meiryo" pitchFamily="34" charset="-122"/>
                 <a:cs typeface="Meiryo" pitchFamily="34" charset="-120"/>
               </a:rPr>
-              <a:t>提出前は「提出」、登録後は「周知」「手術申請」「報告期限」「満了日」。担い手が要綱と期限を覚えておく必要がない。</a:t>
+              <a:t>申請前は「提出」、登録後は「周知」「手術申請」「報告期限」「満了日」へと自動で切り替わる。担い手が要綱の細則や期限を記憶し続ける負担を解消する。</a:t>
             </a:r>
             <a:endParaRPr lang="en-US" sz="1200" dirty="0"/>
           </a:p>
@@ -3591,7 +3638,7 @@
                 <a:ea typeface="Meiryo" pitchFamily="34" charset="-122"/>
                 <a:cs typeface="Meiryo" pitchFamily="34" charset="-120"/>
               </a:rPr>
-              <a:t>画面はプロトタイプ（京都市プロファイル）。規則はコードに書いていない。</a:t>
+              <a:t>画面はプロトタイプ（京都市プロファイル）。判定の応答はモック。本番経路では規則を要綱から毎回抽出する設計で、コードに規則を持たない。</a:t>
             </a:r>
             <a:endParaRPr lang="en-US" sz="800" dirty="0"/>
           </a:p>
@@ -3704,7 +3751,7 @@
                 <a:ea typeface="Meiryo" pitchFamily="34" charset="-122"/>
                 <a:cs typeface="Meiryo" pitchFamily="34" charset="-120"/>
               </a:rPr>
-              <a:t>京都市配布のDOCXに、そのまま転記される。</a:t>
+              <a:t>配布されている指定DOCXファイルのレイアウトを維持したまま自動転記</a:t>
             </a:r>
             <a:endParaRPr lang="en-US" sz="2400" dirty="0"/>
           </a:p>
@@ -3868,7 +3915,7 @@
                 <a:ea typeface="Meiryo" pitchFamily="34" charset="-122"/>
                 <a:cs typeface="Meiryo" pitchFamily="34" charset="-120"/>
               </a:rPr>
-              <a:t>第6号（実施計画書）・第4号（手術実施申請書）・第5号（活動状況報告書）も同様。印刷して出すだけ。</a:t>
+              <a:t>登録申請書（第1号）に加え、実施計画書（第6号）、手術申請書（第4号）、活動報告書（第5号）にも対応。出力書類を印刷して提出するだけの状態に整える。</a:t>
             </a:r>
             <a:endParaRPr lang="en-US" sz="1350" dirty="0"/>
           </a:p>
@@ -4107,7 +4154,7 @@
                 <a:ea typeface="Meiryo" pitchFamily="34" charset="-122"/>
                 <a:cs typeface="Meiryo" pitchFamily="34" charset="-120"/>
               </a:rPr>
-              <a:t>市は、更新が切れそうな地域を、切れる前に知る。</a:t>
+              <a:t>更新期限が迫る活動地域を失効前に把握、未届による脱落を防止</a:t>
             </a:r>
             <a:endParaRPr lang="en-US" sz="2400" dirty="0"/>
           </a:p>
@@ -4343,7 +4390,7 @@
                 <a:ea typeface="Meiryo" pitchFamily="34" charset="-122"/>
                 <a:cs typeface="Meiryo" pitchFamily="34" charset="-120"/>
               </a:rPr>
-              <a:t>不備のない申請だけ届く。</a:t>
+              <a:t>事前チェックを経た不備のない申請データを受理でき、差し戻し対応を削減。</a:t>
             </a:r>
             <a:endParaRPr lang="en-US" sz="1250" dirty="0"/>
           </a:p>
@@ -4372,7 +4419,7 @@
                 <a:ea typeface="Meiryo" pitchFamily="34" charset="-122"/>
                 <a:cs typeface="Meiryo" pitchFamily="34" charset="-120"/>
               </a:rPr>
-              <a:t>「3年横ばい」の中身（終了か、届出なしの脱落か）が初めて分かる。</a:t>
+              <a:t>活動地域数の推移について、正常終了なのか未更新による脱落なのか実態を正確に把握可能。</a:t>
             </a:r>
             <a:endParaRPr lang="en-US" sz="1250" dirty="0"/>
           </a:p>
@@ -4401,7 +4448,7 @@
                 <a:ea typeface="Meiryo" pitchFamily="34" charset="-122"/>
                 <a:cs typeface="Meiryo" pitchFamily="34" charset="-120"/>
               </a:rPr>
-              <a:t>台帳は申請と報告の副産物で、引継ぎ用の入力はさせない。</a:t>
+              <a:t>台帳データは日々の申請・報告から自動集約されるため、引き継ぎ用の追加手入力は不要。</a:t>
             </a:r>
             <a:endParaRPr lang="en-US" sz="1250" dirty="0"/>
           </a:p>
@@ -4595,7 +4642,7 @@
                 <a:ea typeface="Meiryo" pitchFamily="34" charset="-122"/>
                 <a:cs typeface="Meiryo" pitchFamily="34" charset="-120"/>
               </a:rPr>
-              <a:t>4枚目の手間は、こう変わる。</a:t>
+              <a:t>担い手の業務負荷はどう変わるか（導入前後の対比）</a:t>
             </a:r>
             <a:endParaRPr lang="en-US" sz="2400" dirty="0"/>
           </a:p>
@@ -4783,7 +4830,7 @@
                           <a:ea typeface="Meiryo" pitchFamily="34" charset="-122"/>
                           <a:cs typeface="Meiryo" pitchFamily="34" charset="-120"/>
                         </a:rPr>
-                        <a:t>①要綱を読む</a:t>
+                        <a:t>①要綱の読解に苦慮</a:t>
                       </a:r>
                       <a:endParaRPr lang="en-US" sz="1250" dirty="0">
                         <a:latin typeface="Meiryo" charset="0"/>
@@ -4848,7 +4895,7 @@
                           <a:ea typeface="Meiryo" pitchFamily="34" charset="-122"/>
                           <a:cs typeface="Meiryo" pitchFamily="34" charset="-120"/>
                         </a:rPr>
-                        <a:t>話すと条文を引いて返す</a:t>
+                        <a:t>対話を通じて該当条文と要件を提示</a:t>
                       </a:r>
                       <a:endParaRPr lang="en-US" sz="1250" dirty="0">
                         <a:latin typeface="Meiryo" charset="0"/>
@@ -4918,7 +4965,7 @@
                           <a:ea typeface="Meiryo" pitchFamily="34" charset="-122"/>
                           <a:cs typeface="Meiryo" pitchFamily="34" charset="-120"/>
                         </a:rPr>
-                        <a:t>④様式を手書き</a:t>
+                        <a:t>④指定様式への手書き作成</a:t>
                       </a:r>
                       <a:endParaRPr lang="en-US" sz="1250" dirty="0">
                         <a:latin typeface="Meiryo" charset="0"/>
@@ -4983,7 +5030,7 @@
                           <a:ea typeface="Meiryo" pitchFamily="34" charset="-122"/>
                           <a:cs typeface="Meiryo" pitchFamily="34" charset="-120"/>
                         </a:rPr>
-                        <a:t>DOCXに自動転記</a:t>
+                        <a:t>配布DOCXフォーマットへ自動転記</a:t>
                       </a:r>
                       <a:endParaRPr lang="en-US" sz="1250" dirty="0">
                         <a:latin typeface="Meiryo" charset="0"/>
@@ -5053,7 +5100,7 @@
                           <a:ea typeface="Meiryo" pitchFamily="34" charset="-122"/>
                           <a:cs typeface="Meiryo" pitchFamily="34" charset="-120"/>
                         </a:rPr>
-                        <a:t>⑤不備で戻される</a:t>
+                        <a:t>⑤不備による差し戻し</a:t>
                       </a:r>
                       <a:endParaRPr lang="en-US" sz="1250" dirty="0">
                         <a:latin typeface="Meiryo" charset="0"/>
@@ -5118,7 +5165,7 @@
                           <a:ea typeface="Meiryo" pitchFamily="34" charset="-122"/>
                           <a:cs typeface="Meiryo" pitchFamily="34" charset="-120"/>
                         </a:rPr>
-                        <a:t>提出前に分かる</a:t>
+                        <a:t>提出前の事前チェックで不備を解消</a:t>
                       </a:r>
                       <a:endParaRPr lang="en-US" sz="1250" dirty="0">
                         <a:latin typeface="Meiryo" charset="0"/>
@@ -5188,7 +5235,7 @@
                           <a:ea typeface="Meiryo" pitchFamily="34" charset="-122"/>
                           <a:cs typeface="Meiryo" pitchFamily="34" charset="-120"/>
                         </a:rPr>
-                        <a:t>⑥平日に電話</a:t>
+                        <a:t>⑥開庁時間内の電話問い合わせ</a:t>
                       </a:r>
                       <a:endParaRPr lang="en-US" sz="1250" dirty="0">
                         <a:latin typeface="Meiryo" charset="0"/>
@@ -5253,7 +5300,7 @@
                           <a:ea typeface="Meiryo" pitchFamily="34" charset="-122"/>
                           <a:cs typeface="Meiryo" pitchFamily="34" charset="-120"/>
                         </a:rPr>
-                        <a:t>いつでも聞ける</a:t>
+                        <a:t>24時間いつでも対話形式で確認可能</a:t>
                       </a:r>
                       <a:endParaRPr lang="en-US" sz="1250" dirty="0">
                         <a:latin typeface="Meiryo" charset="0"/>
@@ -5323,7 +5370,7 @@
                           <a:ea typeface="Meiryo" pitchFamily="34" charset="-122"/>
                           <a:cs typeface="Meiryo" pitchFamily="34" charset="-120"/>
                         </a:rPr>
-                        <a:t>⑦受付・期限を記憶</a:t>
+                        <a:t>⑦受付日・有効期限の自己管理</a:t>
                       </a:r>
                       <a:endParaRPr lang="en-US" sz="1250" dirty="0">
                         <a:latin typeface="Meiryo" charset="0"/>
@@ -5388,7 +5435,7 @@
                           <a:ea typeface="Meiryo" pitchFamily="34" charset="-122"/>
                           <a:cs typeface="Meiryo" pitchFamily="34" charset="-120"/>
                         </a:rPr>
-                        <a:t>自動計算、期日に促す（高島市：逃すと+30日、を出す前に示す）</a:t>
+                        <a:t>自動計算により期日に促す（高島市：逃すと+30日、を事前に可視化）</a:t>
                       </a:r>
                       <a:endParaRPr lang="en-US" sz="1250" dirty="0">
                         <a:latin typeface="Meiryo" charset="0"/>
@@ -5458,7 +5505,7 @@
                           <a:ea typeface="Meiryo" pitchFamily="34" charset="-122"/>
                           <a:cs typeface="Meiryo" pitchFamily="34" charset="-120"/>
                         </a:rPr>
-                        <a:t>⑨⑩報告・更新を忘れて抹消</a:t>
+                        <a:t>⑨⑩報告・更新忘れによる職権抹消</a:t>
                       </a:r>
                       <a:endParaRPr lang="en-US" sz="1250" dirty="0">
                         <a:latin typeface="Meiryo" charset="0"/>
@@ -5523,7 +5570,7 @@
                           <a:ea typeface="Meiryo" pitchFamily="34" charset="-122"/>
                           <a:cs typeface="Meiryo" pitchFamily="34" charset="-120"/>
                         </a:rPr>
-                        <a:t>期日に促し、話すだけで様式が出る</a:t>
+                        <a:t>期日前の通知と簡単な対話で報告様式を生成</a:t>
                       </a:r>
                       <a:endParaRPr lang="en-US" sz="1250" dirty="0">
                         <a:latin typeface="Meiryo" charset="0"/>
@@ -5593,7 +5640,7 @@
                           <a:ea typeface="Meiryo" pitchFamily="34" charset="-122"/>
                           <a:cs typeface="Meiryo" pitchFamily="34" charset="-120"/>
                         </a:rPr>
-                        <a:t>⑪倒れたら消える</a:t>
+                        <a:t>⑪担い手の離脱による活動記録の喪失</a:t>
                       </a:r>
                       <a:endParaRPr lang="en-US" sz="1250" dirty="0">
                         <a:latin typeface="Meiryo" charset="0"/>
@@ -5658,7 +5705,7 @@
                           <a:ea typeface="Meiryo" pitchFamily="34" charset="-122"/>
                           <a:cs typeface="Meiryo" pitchFamily="34" charset="-120"/>
                         </a:rPr>
-                        <a:t>市の台帳に残る</a:t>
+                        <a:t>自治体管理台帳への自動連携</a:t>
                       </a:r>
                       <a:endParaRPr lang="en-US" sz="1250" dirty="0">
                         <a:latin typeface="Meiryo" charset="0"/>
@@ -5750,7 +5797,7 @@
                 <a:ea typeface="Meiryo" pitchFamily="34" charset="-122"/>
                 <a:cs typeface="Meiryo" pitchFamily="34" charset="-120"/>
               </a:rPr>
-              <a:t>残るもの：②人集め ③町内会への説明 ⑧捕獲。ここは人。</a:t>
+              <a:t>システムで代替せず人が担うべき領域：合意形成と捕獲実務（②人集め ③町内会への説明 ⑧捕獲）</a:t>
             </a:r>
             <a:endParaRPr lang="en-US" sz="1300" dirty="0"/>
           </a:p>
@@ -5902,7 +5949,7 @@
                 <a:ea typeface="Meiryo" pitchFamily="34" charset="-122"/>
                 <a:cs typeface="Meiryo" pitchFamily="34" charset="-120"/>
               </a:rPr>
-              <a:t>要綱を差し替えるだけで別の自治体に対応する。規則はコードに1行も書いていない。</a:t>
+              <a:t>要綱データの差し替えのみで他自治体へ展開可能、規則をコードに依存させない構造</a:t>
             </a:r>
             <a:endParaRPr lang="en-US" sz="2400" dirty="0"/>
           </a:p>
@@ -5910,7 +5957,7 @@
       </p:sp>
       <p:pic>
         <p:nvPicPr>
-          <p:cNvPr id="3" name="Image 0" descr="/home/user/VORN/docs/deck3/tk_sim.jpg">    </p:cNvPr>
+          <p:cNvPr id="3" name="Image 0" descr="/home/user/VORN/docs/deck3/tk_sim_tiles.jpg">    </p:cNvPr>
           <p:cNvPicPr>
             <a:picLocks noChangeAspect="1"/>
           </p:cNvPicPr>
@@ -5918,13 +5965,14 @@
         </p:nvPicPr>
         <p:blipFill>
           <a:blip r:embed="rId1"/>
-          <a:srcRect l="0" r="99987" t="0" b="99987"/>
-          <a:stretch/>
+          <a:stretch>
+            <a:fillRect/>
+          </a:stretch>
         </p:blipFill>
         <p:spPr>
           <a:xfrm>
             <a:off x="685800" y="1463040"/>
-            <a:ext cx="1400" cy="284"/>
+            <a:ext cx="7863840" cy="914400"/>
           </a:xfrm>
           <a:prstGeom prst="rect">
             <a:avLst/>
@@ -5940,7 +5988,7 @@
         <p:spPr>
           <a:xfrm>
             <a:off x="685800" y="1463040"/>
-            <a:ext cx="10817352" cy="2194560"/>
+            <a:ext cx="7863840" cy="1471661"/>
           </a:xfrm>
           <a:prstGeom prst="rect">
             <a:avLst/>
@@ -5961,12 +6009,12 @@
         </p:nvSpPr>
         <p:spPr>
           <a:xfrm>
-            <a:off x="868680" y="2926080"/>
-            <a:ext cx="4206240" cy="640080"/>
+            <a:off x="8778240" y="1554480"/>
+            <a:ext cx="2743200" cy="1005840"/>
           </a:xfrm>
           <a:prstGeom prst="roundRect">
             <a:avLst>
-              <a:gd name="adj" fmla="val 8571"/>
+              <a:gd name="adj" fmla="val 5455"/>
             </a:avLst>
           </a:prstGeom>
           <a:solidFill>
@@ -5995,8 +6043,8 @@
         </p:nvSpPr>
         <p:spPr>
           <a:xfrm>
-            <a:off x="978408" y="2999232"/>
-            <a:ext cx="3986784" cy="493776"/>
+            <a:off x="8887968" y="1627632"/>
+            <a:ext cx="2523744" cy="859536"/>
           </a:xfrm>
           <a:prstGeom prst="rect">
             <a:avLst/>
@@ -6181,7 +6229,7 @@
                 <a:ea typeface="Meiryo" pitchFamily="34" charset="-122"/>
                 <a:cs typeface="Meiryo" pitchFamily="34" charset="-120"/>
               </a:rPr>
-              <a:t>住民が申請し、期限があり、報告と更新があり、担い手が無償で属人的な制度は、行政の中に他にもある。</a:t>
+              <a:t>「住民申請・厳密な期限管理・定期報告と更新・ボランティアへの依存」という構造を持つ行政手続きは、地域猫活動以外にも幅広く存在する。</a:t>
             </a:r>
             <a:endParaRPr lang="en-US" sz="1250" dirty="0"/>
           </a:p>
@@ -6333,7 +6381,7 @@
                 <a:ea typeface="Meiryo" pitchFamily="34" charset="-122"/>
                 <a:cs typeface="Meiryo" pitchFamily="34" charset="-120"/>
               </a:rPr>
-              <a:t>自治体ごとに違う自然言語のルールを、AIが個人の代わりに読み、追い続ける。</a:t>
+              <a:t>自治体ごとに異なる自然言語のルールを、AIが利用者に代わって読解・追跡</a:t>
             </a:r>
             <a:endParaRPr lang="en-US" sz="2400" dirty="0"/>
           </a:p>
@@ -6375,7 +6423,7 @@
                 <a:ea typeface="Meiryo" pitchFamily="34" charset="-122"/>
                 <a:cs typeface="Meiryo" pitchFamily="34" charset="-120"/>
               </a:rPr>
-              <a:t>このエンジンが読んでいるのは「猫の要綱」ではなく「自治体が自然言語で公開している要綱と様式」。</a:t>
+              <a:t>本エンジンが処理する対象は「猫の要綱」に限定されず、「自治体が自然言語で公開する要綱と様式そのもの」。</a:t>
             </a:r>
             <a:endParaRPr lang="en-US" sz="1500" dirty="0"/>
           </a:p>
@@ -6404,7 +6452,7 @@
                 <a:ea typeface="Meiryo" pitchFamily="34" charset="-122"/>
                 <a:cs typeface="Meiryo" pitchFamily="34" charset="-120"/>
               </a:rPr>
-              <a:t>猫は、効果が実証済みで、担い手が最も薄く、市が障壁を認めた場所だから、ここから始めた。</a:t>
+              <a:t>地域猫活動は、施策効果が実証されている一方で担い手不足が深刻であり、行政側も手続きの複雑さを課題視しているため、最初の適用対象として着手。</a:t>
             </a:r>
             <a:endParaRPr lang="en-US" sz="1500" dirty="0"/>
           </a:p>
@@ -6920,7 +6968,7 @@
                 <a:ea typeface="Meiryo" pitchFamily="34" charset="-122"/>
                 <a:cs typeface="Meiryo" pitchFamily="34" charset="-120"/>
               </a:rPr>
-              <a:t>京都市で立ち上げ、動物病院と苦情窓口から届ける。</a:t>
+              <a:t>京都市域から展開、動物病院と相談窓口を起点に利用者を支援</a:t>
             </a:r>
             <a:endParaRPr lang="en-US" sz="2400" dirty="0"/>
           </a:p>
@@ -6989,7 +7037,7 @@
                 <a:ea typeface="Meiryo" pitchFamily="34" charset="-122"/>
                 <a:cs typeface="Meiryo" pitchFamily="34" charset="-120"/>
               </a:rPr>
-              <a:t>届け方</a:t>
+              <a:t>展開経路</a:t>
             </a:r>
             <a:endParaRPr lang="en-US" sz="1500" dirty="0"/>
           </a:p>
@@ -7031,7 +7079,7 @@
                 <a:ea typeface="Meiryo" pitchFamily="34" charset="-122"/>
                 <a:cs typeface="Meiryo" pitchFamily="34" charset="-120"/>
               </a:rPr>
-              <a:t>京都市で立ち上げ。動物病院（京都市獣医師会がまちねこ活動をサポート）と苦情窓口から。払い手は市の既存予算の事務コスト。</a:t>
+              <a:t>京都市から立ち上げ。動物病院（京都市獣医師会）や行政の相談窓口を通じて案内。費用対効果として、自治体窓口の問い合わせ対応や不備対応に関わる事務コストを削減。</a:t>
             </a:r>
             <a:endParaRPr lang="en-US" sz="1200" dirty="0"/>
           </a:p>
@@ -7211,7 +7259,7 @@
                 <a:ea typeface="Meiryo" pitchFamily="34" charset="-122"/>
                 <a:cs typeface="Meiryo" pitchFamily="34" charset="-120"/>
               </a:rPr>
-              <a:t>限界</a:t>
+              <a:t>今後の検証課題と開発状況</a:t>
             </a:r>
             <a:endParaRPr lang="en-US" sz="1500" dirty="0"/>
           </a:p>
@@ -7253,7 +7301,7 @@
                 <a:ea typeface="Meiryo" pitchFamily="34" charset="-122"/>
                 <a:cs typeface="Meiryo" pitchFamily="34" charset="-120"/>
               </a:rPr>
-              <a:t>当事者ヒアリング未実施（通過後にセンター・基金へ）／高島市要綱PDF未取得／実APIの応答品質は検証中で、掲載画面はモック応答で撮影</a:t>
+              <a:t>審査通過後にセンター・基金への当事者ヒアリングを実施予定／高島市要綱PDFの取得と検証／API応答精度の検証を継続中（掲載画面はモック応答による検証環境で撮影）</a:t>
             </a:r>
             <a:endParaRPr lang="en-US" sz="1200" dirty="0"/>
           </a:p>
@@ -8123,6 +8171,104 @@
             </a:r>
             <a:endParaRPr lang="en-US" sz="850" dirty="0"/>
           </a:p>
+          <a:p>
+            <a:pPr algn="l" indent="0" marL="0">
+              <a:lnSpc>
+                <a:spcPct val="130000"/>
+              </a:lnSpc>
+              <a:buNone/>
+            </a:pPr>
+            <a:endParaRPr lang="en-US" sz="850" dirty="0"/>
+          </a:p>
+          <a:p>
+            <a:pPr algn="l" indent="0" marL="0">
+              <a:lnSpc>
+                <a:spcPct val="130000"/>
+              </a:lnSpc>
+              <a:buNone/>
+            </a:pPr>
+            <a:r>
+              <a:rPr lang="en-US" sz="850" dirty="0">
+                <a:solidFill>
+                  <a:srgbClr val="1F2A37"/>
+                </a:solidFill>
+                <a:latin typeface="Meiryo" pitchFamily="34" charset="0"/>
+                <a:ea typeface="Meiryo" pitchFamily="34" charset="-122"/>
+                <a:cs typeface="Meiryo" pitchFamily="34" charset="-120"/>
+              </a:rPr>
+              <a:t>函館市</a:t>
+            </a:r>
+            <a:endParaRPr lang="en-US" sz="850" dirty="0"/>
+          </a:p>
+          <a:p>
+            <a:pPr algn="l" indent="0" marL="0">
+              <a:lnSpc>
+                <a:spcPct val="130000"/>
+              </a:lnSpc>
+              <a:buNone/>
+            </a:pPr>
+            <a:r>
+              <a:rPr lang="en-US" sz="850" dirty="0">
+                <a:solidFill>
+                  <a:srgbClr val="1F2A37"/>
+                </a:solidFill>
+                <a:latin typeface="Meiryo" pitchFamily="34" charset="0"/>
+                <a:ea typeface="Meiryo" pitchFamily="34" charset="-122"/>
+                <a:cs typeface="Meiryo" pitchFamily="34" charset="-120"/>
+              </a:rPr>
+              <a:t>https://www.city.hakodate.hokkaido.jp/docs/2019041000041/</a:t>
+            </a:r>
+            <a:endParaRPr lang="en-US" sz="850" dirty="0"/>
+          </a:p>
+          <a:p>
+            <a:pPr algn="l" indent="0" marL="0">
+              <a:lnSpc>
+                <a:spcPct val="130000"/>
+              </a:lnSpc>
+              <a:buNone/>
+            </a:pPr>
+            <a:endParaRPr lang="en-US" sz="850" dirty="0"/>
+          </a:p>
+          <a:p>
+            <a:pPr algn="l" indent="0" marL="0">
+              <a:lnSpc>
+                <a:spcPct val="130000"/>
+              </a:lnSpc>
+              <a:buNone/>
+            </a:pPr>
+            <a:r>
+              <a:rPr lang="en-US" sz="850" dirty="0">
+                <a:solidFill>
+                  <a:srgbClr val="1F2A37"/>
+                </a:solidFill>
+                <a:latin typeface="Meiryo" pitchFamily="34" charset="0"/>
+                <a:ea typeface="Meiryo" pitchFamily="34" charset="-122"/>
+                <a:cs typeface="Meiryo" pitchFamily="34" charset="-120"/>
+              </a:rPr>
+              <a:t>広島市</a:t>
+            </a:r>
+            <a:endParaRPr lang="en-US" sz="850" dirty="0"/>
+          </a:p>
+          <a:p>
+            <a:pPr algn="l" indent="0" marL="0">
+              <a:lnSpc>
+                <a:spcPct val="130000"/>
+              </a:lnSpc>
+              <a:buNone/>
+            </a:pPr>
+            <a:r>
+              <a:rPr lang="en-US" sz="850" dirty="0">
+                <a:solidFill>
+                  <a:srgbClr val="1F2A37"/>
+                </a:solidFill>
+                <a:latin typeface="Meiryo" pitchFamily="34" charset="0"/>
+                <a:ea typeface="Meiryo" pitchFamily="34" charset="-122"/>
+                <a:cs typeface="Meiryo" pitchFamily="34" charset="-120"/>
+              </a:rPr>
+              <a:t>https://www.city.hiroshima.lg.jp/living/dobutsu/1023459/1023540/1023556.html</a:t>
+            </a:r>
+            <a:endParaRPr lang="en-US" sz="850" dirty="0"/>
+          </a:p>
         </p:txBody>
       </p:sp>
       <p:sp>
@@ -8357,7 +8503,7 @@
                 <a:ea typeface="Meiryo" pitchFamily="34" charset="-122"/>
                 <a:cs typeface="Meiryo" pitchFamily="34" charset="-120"/>
               </a:rPr>
-              <a:t>本資料の数字はすべて上記の一次情報から引用。事業の効果（収容減・苦情減）は京都市の事業の効果であり、本プロダクトの効果ではない。本プロダクトが変えるのは「申請から手術までの日数」「登録の継続率」「担い手交代後の継続」。</a:t>
+              <a:t>本資料の数値はすべて上記一次情報からの引用。収容数や苦情の減少といった実績は京都市の既存事業による成果であり、現時点における本プロダクトの実績値ではない。本システムが直接変革を目指す指標は「申請から手術までの所要日数」「制度登録の継続率」「担い手交代時における活動の継続性」である。</a:t>
             </a:r>
             <a:endParaRPr lang="en-US" sz="850" dirty="0"/>
           </a:p>
@@ -8968,7 +9114,7 @@
                 <a:ea typeface="Meiryo" pitchFamily="34" charset="-122"/>
                 <a:cs typeface="Meiryo" pitchFamily="34" charset="-120"/>
               </a:rPr>
-              <a:t>同じ「野良猫の不妊手術」でも、自治体ごとに要綱も様式も受付日も違う。</a:t>
+              <a:t>同じ「野良猫の不妊手術」でも、自治体ごとに要綱・様式・受付期間が異なる</a:t>
             </a:r>
             <a:endParaRPr lang="en-US" sz="2400" dirty="0"/>
           </a:p>
@@ -9010,7 +9156,7 @@
                 <a:ea typeface="Meiryo" pitchFamily="34" charset="-122"/>
                 <a:cs typeface="Meiryo" pitchFamily="34" charset="-120"/>
               </a:rPr>
-              <a:t>京都市は要綱16条＋6様式、登録3年、報告は毎年30日以内。高島市は毎月6日〜末日に申請して翌々月分のチケット、写真付き報告。函館市は個人不可で団体登録が要る。広島市は年度末まで、途中で増えた猫は別扱い。</a:t>
+              <a:t>京都市は要綱16条と6様式があり、登録期間は3年、年1回の報告義務（期限30日以内）が課される。高島市は毎月6日〜末日の申請で翌々月分のチケットが交付され、写真付き報告が必要となる。函館市は個人申請不可で団体登録が必須であり、広島市は年度末区切りで途中の増頭は別扱いとなるなど、運用ルールは自治体ごとに分断されている。</a:t>
             </a:r>
             <a:endParaRPr lang="en-US" sz="1150" dirty="0"/>
           </a:p>
@@ -9310,7 +9456,7 @@
                 <a:ea typeface="Meiryo" pitchFamily="34" charset="-122"/>
                 <a:cs typeface="Meiryo" pitchFamily="34" charset="-120"/>
               </a:rPr>
-              <a:t>出典：京都市まちねこ活動支援事業ページ・要綱／高島市 環境政策課ページ／函館市・広島市は各自治体ページ</a:t>
+              <a:t>出典：京都市まちねこ活動支援事業ページ・要綱／高島市 環境政策課ページ／函館市・広島市の各ページ（付録A）</a:t>
             </a:r>
             <a:endParaRPr lang="en-US" sz="800" dirty="0"/>
           </a:p>
@@ -9423,7 +9569,7 @@
                 <a:ea typeface="Meiryo" pitchFamily="34" charset="-122"/>
                 <a:cs typeface="Meiryo" pitchFamily="34" charset="-120"/>
               </a:rPr>
-              <a:t>市が出すのは手術・保護器・助言まで。あとは住民が無償でやる。</a:t>
+              <a:t>行政が提供するのは手術枠・捕獲器・助言まで。実務は住民の無償活動に依存し、高齢化と後継者不足が深刻化</a:t>
             </a:r>
             <a:endParaRPr lang="en-US" sz="2400" dirty="0"/>
           </a:p>
@@ -10073,7 +10219,7 @@
                 <a:ea typeface="Meiryo" pitchFamily="34" charset="-122"/>
                 <a:cs typeface="Meiryo" pitchFamily="34" charset="-120"/>
               </a:rPr>
-              <a:t>無償・少数・高齢・後継なし</a:t>
+              <a:t>無償のボランティア活動（少数・高齢化・後継者不在の課題）</a:t>
             </a:r>
             <a:endParaRPr lang="en-US" sz="1100" dirty="0"/>
           </a:p>
@@ -10225,7 +10371,7 @@
                 <a:ea typeface="Meiryo" pitchFamily="34" charset="-122"/>
                 <a:cs typeface="Meiryo" pitchFamily="34" charset="-120"/>
               </a:rPr>
-              <a:t>一つのコロニーを終わらせるために、一人がやっていること。</a:t>
+              <a:t>1つのコロニーを収束させるために、ボランティア1人が担う11の工程（京都市の事例）</a:t>
             </a:r>
             <a:endParaRPr lang="en-US" sz="2400" dirty="0"/>
           </a:p>
@@ -10378,7 +10524,7 @@
                 <a:ea typeface="Meiryo" pitchFamily="34" charset="-122"/>
                 <a:cs typeface="Meiryo" pitchFamily="34" charset="-120"/>
               </a:rPr>
-              <a:t>要綱を読んで自分の場合を探す</a:t>
+              <a:t>複雑な要綱を読み込み、自身に当てはまる条件を探す</a:t>
             </a:r>
             <a:endParaRPr lang="en-US" sz="1050" dirty="0"/>
           </a:p>
@@ -10933,7 +11079,7 @@
                 <a:ea typeface="Meiryo" pitchFamily="34" charset="-122"/>
                 <a:cs typeface="Meiryo" pitchFamily="34" charset="-120"/>
               </a:rPr>
-              <a:t>分からないことは平日にセンターへ電話</a:t>
+              <a:t>疑問点が生じるたび、平日にセンターへ電話で確認する</a:t>
             </a:r>
             <a:endParaRPr lang="en-US" sz="1050" dirty="0"/>
           </a:p>
@@ -11044,7 +11190,7 @@
                 <a:ea typeface="Meiryo" pitchFamily="34" charset="-122"/>
                 <a:cs typeface="Meiryo" pitchFamily="34" charset="-120"/>
               </a:rPr>
-              <a:t>受付日と有効期限を自分で管理</a:t>
+              <a:t>申請受付日や有効期限を手作業で管理する</a:t>
             </a:r>
             <a:endParaRPr lang="en-US" sz="1050" dirty="0"/>
           </a:p>
@@ -11488,7 +11634,7 @@
                 <a:ea typeface="Meiryo" pitchFamily="34" charset="-122"/>
                 <a:cs typeface="Meiryo" pitchFamily="34" charset="-120"/>
               </a:rPr>
-              <a:t>自分が倒れた時の引継ぎ</a:t>
+              <a:t>自身の体調不良や離脱に備えた活動情報の引き継ぎ</a:t>
             </a:r>
             <a:endParaRPr lang="en-US" sz="1050" dirty="0"/>
           </a:p>
@@ -11541,7 +11687,7 @@
                 <a:ea typeface="Meiryo" pitchFamily="34" charset="-122"/>
                 <a:cs typeface="Meiryo" pitchFamily="34" charset="-120"/>
               </a:rPr>
-              <a:t>  要綱と期限に関わる事務。8枚目で置き換え対象になる    </a:t>
+              <a:t>  要綱と期日管理に関わる事務（本システムによる代替対象）    </a:t>
             </a:r>
             <a:pPr indent="0" marL="0">
               <a:buNone/>
@@ -11569,7 +11715,7 @@
                 <a:ea typeface="Meiryo" pitchFamily="34" charset="-122"/>
                 <a:cs typeface="Meiryo" pitchFamily="34" charset="-120"/>
               </a:rPr>
-              <a:t>  人がやること（人集め・説明・捕獲）    </a:t>
+              <a:t>  対人調整・現場作業（人集め・説明・捕獲）    </a:t>
             </a:r>
             <a:pPr indent="0" marL="0">
               <a:buNone/>
@@ -11749,7 +11895,7 @@
                 <a:ea typeface="Meiryo" pitchFamily="34" charset="-122"/>
                 <a:cs typeface="Meiryo" pitchFamily="34" charset="-120"/>
               </a:rPr>
-              <a:t>手間のどこで止まっても、猫は待ってくれない。</a:t>
+              <a:t>事務手続きの停滞が、繁殖の連鎖に直結する</a:t>
             </a:r>
             <a:endParaRPr lang="en-US" sz="2400" dirty="0"/>
           </a:p>
@@ -11795,7 +11941,7 @@
                 <a:ea typeface="Meiryo" pitchFamily="34" charset="-122"/>
                 <a:cs typeface="Meiryo" pitchFamily="34" charset="-120"/>
               </a:rPr>
-              <a:t>受付を1回逃す → 手術は1か月遅れ → 次の出産（年2〜3回、一度に4〜6匹）が先に来る</a:t>
+              <a:t>受付を1回逃す → 手術が1か月遅延 → 次の出産期（年2〜3回、一度に4〜6頭）が到来</a:t>
             </a:r>
             <a:endParaRPr lang="en-US" sz="1150" dirty="0"/>
           </a:p>
@@ -11843,7 +11989,7 @@
                 <a:ea typeface="Meiryo" pitchFamily="34" charset="-122"/>
                 <a:cs typeface="Meiryo" pitchFamily="34" charset="-120"/>
               </a:rPr>
-              <a:t>報告を落とす → 京都市要綱第7条3項、職権で抹消</a:t>
+              <a:t>定期報告の失念 → 要綱第7条3項に基づき職権で登録抹消</a:t>
             </a:r>
             <a:endParaRPr lang="en-US" sz="1150" dirty="0"/>
           </a:p>
@@ -11867,7 +12013,7 @@
                 <a:ea typeface="Meiryo" pitchFamily="34" charset="-122"/>
                 <a:cs typeface="Meiryo" pitchFamily="34" charset="-120"/>
               </a:rPr>
-              <a:t>担い手が倒れる → どの猫が手術済みか、餌場がどこか、情報ごと消える</a:t>
+              <a:t>担い手の離脱 → 手術履歴や給餌場所などの活動情報が完全に喪失</a:t>
             </a:r>
             <a:endParaRPr lang="en-US" sz="1150" dirty="0"/>
           </a:p>
@@ -12002,7 +12148,7 @@
                 <a:ea typeface="Meiryo" pitchFamily="34" charset="-122"/>
                 <a:cs typeface="Meiryo" pitchFamily="34" charset="-120"/>
               </a:rPr>
-              <a:t>▮ 制度の受付窓（月1回・数日）→ 使えるのは翌月</a:t>
+              <a:t>▮ 基金型自治体の受付窓（月1回・数日）→ 使えるのは翌月</a:t>
             </a:r>
             <a:endParaRPr lang="en-US" sz="1100" dirty="0"/>
           </a:p>
@@ -12846,7 +12992,7 @@
                 <a:ea typeface="Meiryo" pitchFamily="34" charset="-122"/>
                 <a:cs typeface="Meiryo" pitchFamily="34" charset="-120"/>
               </a:rPr>
-              <a:t>非営利で金が回らず、自治体ごとに違うので個別開発も成立しない。だから人手しかなかった。</a:t>
+              <a:t>非営利かつ自治体ごとに仕様が異なるため、システム化が進まず人手作業に依存</a:t>
             </a:r>
             <a:endParaRPr lang="en-US" sz="2400" dirty="0"/>
           </a:p>
@@ -12888,7 +13034,7 @@
                 <a:ea typeface="Meiryo" pitchFamily="34" charset="-122"/>
                 <a:cs typeface="Meiryo" pitchFamily="34" charset="-120"/>
               </a:rPr>
-              <a:t>1自治体の担い手は数十〜数百人。協働自治体は298で要綱は全部違う。誰も作らず、現場は電話・LINE・Excel・紙のまま。</a:t>
+              <a:t>1自治体あたりの担い手は数十〜数百人規模にとどまる一方、協働自治体は298にのぼり、要綱はすべて異なる。汎用ツールが存在しないため、現場では電話、LINE、Excel、紙によるアナログな手作業が続いている。</a:t>
             </a:r>
             <a:endParaRPr lang="en-US" sz="1300" dirty="0"/>
           </a:p>
@@ -13526,7 +13672,7 @@
                 <a:ea typeface="Meiryo" pitchFamily="34" charset="-122"/>
                 <a:cs typeface="Meiryo" pitchFamily="34" charset="-120"/>
               </a:rPr>
-              <a:t>人手を増やさずに、この手間を消せるか。</a:t>
+              <a:t>限られた人手のなかで、この過重な事務負担を解消できるか</a:t>
             </a:r>
             <a:endParaRPr lang="en-US" sz="3400" dirty="0"/>
           </a:p>
@@ -13667,7 +13813,7 @@
                 <a:ea typeface="Meiryo" pitchFamily="34" charset="-122"/>
                 <a:cs typeface="Meiryo" pitchFamily="34" charset="-120"/>
               </a:rPr>
-              <a:t>AIは自然言語の規則をそのまま読み、個別の事情にまとめ直し、何件でも追い続けられる。</a:t>
+              <a:t>AIが自然言語の規則を直接読み解き、個別の状況に合わせて整理し、期日を追跡</a:t>
             </a:r>
             <a:endParaRPr lang="en-US" sz="2400" dirty="0"/>
           </a:p>
@@ -13778,7 +13924,7 @@
                 <a:ea typeface="Meiryo" pitchFamily="34" charset="-122"/>
                 <a:cs typeface="Meiryo" pitchFamily="34" charset="-120"/>
               </a:rPr>
-              <a:t>要綱PDF・様式DOCX・FAQを構造化せずそのまま読み、条件と期限を引く。</a:t>
+              <a:t>要綱PDF・様式DOCX・FAQを構造化せずそのまま読み込み、適用条件と期限を抽出</a:t>
             </a:r>
             <a:endParaRPr lang="en-US" sz="1200" dirty="0"/>
           </a:p>
@@ -13889,7 +14035,7 @@
                 <a:ea typeface="Meiryo" pitchFamily="34" charset="-122"/>
                 <a:cs typeface="Meiryo" pitchFamily="34" charset="-120"/>
               </a:rPr>
-              <a:t>「この場所・この頭数・この自治体・今日」に翻訳して返す。</a:t>
+              <a:t>「活動場所・頭数・自治体・現在日」に合わせた必要情報へ再構成</a:t>
             </a:r>
             <a:endParaRPr lang="en-US" sz="1200" dirty="0"/>
           </a:p>
@@ -14000,7 +14146,7 @@
                 <a:ea typeface="Meiryo" pitchFamily="34" charset="-122"/>
                 <a:cs typeface="Meiryo" pitchFamily="34" charset="-120"/>
               </a:rPr>
-              <a:t>登録日から期限を計算し、期日に促す。忘れない。</a:t>
+              <a:t>登録日から期限を自動計算し、適切なタイミングで申請を促す</a:t>
             </a:r>
             <a:endParaRPr lang="en-US" sz="1200" dirty="0"/>
           </a:p>
@@ -14111,7 +14257,7 @@
                 <a:ea typeface="Meiryo" pitchFamily="34" charset="-122"/>
                 <a:cs typeface="Meiryo" pitchFamily="34" charset="-120"/>
               </a:rPr>
-              <a:t>自治体が変われば要綱を差し替えるだけ。規則をコードに書かない。</a:t>
+              <a:t>規則をコードに持たず、要綱資料を差し替えるだけで他自治体に対応</a:t>
             </a:r>
             <a:endParaRPr lang="en-US" sz="1200" dirty="0"/>
           </a:p>
@@ -14172,7 +14318,7 @@
               <a:buNone/>
             </a:pPr>
             <a:r>
-              <a:rPr lang="en-US" sz="1600" dirty="0">
+              <a:rPr lang="en-US" sz="1500" dirty="0">
                 <a:solidFill>
                   <a:srgbClr val="000000"/>
                 </a:solidFill>
@@ -14180,7 +14326,7 @@
                 <a:ea typeface="Meiryo" pitchFamily="34" charset="-122"/>
                 <a:cs typeface="Meiryo" pitchFamily="34" charset="-120"/>
               </a:rPr>
-              <a:t>4枚目の作業のうち、</a:t>
+              <a:t>4枚目の工程のうち、事務手続きに関わる7つ（</a:t>
             </a:r>
             <a:pPr indent="0" marL="0">
               <a:lnSpc>
@@ -14189,7 +14335,7 @@
               <a:buNone/>
             </a:pPr>
             <a:r>
-              <a:rPr lang="en-US" sz="1600" b="1" dirty="0">
+              <a:rPr lang="en-US" sz="1500" b="1" dirty="0">
                 <a:solidFill>
                   <a:srgbClr val="B5442D"/>
                 </a:solidFill>
@@ -14197,7 +14343,7 @@
                 <a:ea typeface="Meiryo" pitchFamily="34" charset="-122"/>
                 <a:cs typeface="Meiryo" pitchFamily="34" charset="-120"/>
               </a:rPr>
-              <a:t>①⑥⑦⑨⑩⑪</a:t>
+              <a:t>①④⑥⑦⑨⑩⑪</a:t>
             </a:r>
             <a:pPr indent="0" marL="0">
               <a:lnSpc>
@@ -14206,7 +14352,7 @@
               <a:buNone/>
             </a:pPr>
             <a:r>
-              <a:rPr lang="en-US" sz="1600" dirty="0">
+              <a:rPr lang="en-US" sz="1500" dirty="0">
                 <a:solidFill>
                   <a:srgbClr val="000000"/>
                 </a:solidFill>
@@ -14214,9 +14360,9 @@
                 <a:ea typeface="Meiryo" pitchFamily="34" charset="-122"/>
                 <a:cs typeface="Meiryo" pitchFamily="34" charset="-120"/>
               </a:rPr>
-              <a:t> は人手ではなくこれで置き換えられる。</a:t>
-            </a:r>
-            <a:endParaRPr lang="en-US" sz="1600" dirty="0"/>
+              <a:t>）と不備の差し戻し（⑤）をAIで代替。</a:t>
+            </a:r>
+            <a:endParaRPr lang="en-US" sz="1500" dirty="0"/>
           </a:p>
           <a:p>
             <a:pPr indent="0" marL="0">
@@ -14226,7 +14372,7 @@
               <a:buNone/>
             </a:pPr>
             <a:r>
-              <a:rPr lang="en-US" sz="1300" dirty="0">
+              <a:rPr lang="en-US" sz="1250" dirty="0">
                 <a:solidFill>
                   <a:srgbClr val="5B6570"/>
                 </a:solidFill>
@@ -14234,9 +14380,9 @@
                 <a:ea typeface="Meiryo" pitchFamily="34" charset="-122"/>
                 <a:cs typeface="Meiryo" pitchFamily="34" charset="-120"/>
               </a:rPr>
-              <a:t>②人集め・③町内会への説明・⑧捕獲は人がやる。</a:t>
-            </a:r>
-            <a:endParaRPr lang="en-US" sz="1600" dirty="0"/>
+              <a:t>対人折衝や捕獲（②③⑧）など人が向き合うべき実務に集中できる環境をつくる。</a:t>
+            </a:r>
+            <a:endParaRPr lang="en-US" sz="1500" dirty="0"/>
           </a:p>
         </p:txBody>
       </p:sp>
@@ -14375,7 +14521,7 @@
                 <a:ea typeface="Meiryo" pitchFamily="34" charset="-122"/>
                 <a:cs typeface="Meiryo" pitchFamily="34" charset="-120"/>
               </a:rPr>
-              <a:t>地域猫に限定して、一例を作った。会話で入れると、次にやることと書類が出て、市の台帳に残る。</a:t>
+              <a:t>地域猫活動に特化したプロトタイプ：対話入力からタスク提示・書類作成・台帳連携までを一貫処理</a:t>
             </a:r>
             <a:endParaRPr lang="en-US" sz="2400" dirty="0"/>
           </a:p>
@@ -14428,7 +14574,7 @@
                 <a:ea typeface="Meiryo" pitchFamily="34" charset="-122"/>
                 <a:cs typeface="Meiryo" pitchFamily="34" charset="-120"/>
               </a:rPr>
-              <a:t>会話で入れる</a:t>
+              <a:t>対話による自然な情報入力</a:t>
             </a:r>
             <a:endParaRPr lang="en-US" sz="1100" dirty="0"/>
           </a:p>
@@ -14526,7 +14672,7 @@
                 <a:ea typeface="Meiryo" pitchFamily="34" charset="-122"/>
                 <a:cs typeface="Meiryo" pitchFamily="34" charset="-120"/>
               </a:rPr>
-              <a:t>次にやることと様式が出る</a:t>
+              <a:t>次のタスク案内と指定様式の自動出力</a:t>
             </a:r>
             <a:endParaRPr lang="en-US" sz="1100" dirty="0"/>
           </a:p>
@@ -14669,7 +14815,7 @@
                 <a:ea typeface="Meiryo" pitchFamily="34" charset="-122"/>
                 <a:cs typeface="Meiryo" pitchFamily="34" charset="-120"/>
               </a:rPr>
-              <a:t>市の台帳に残る</a:t>
+              <a:t>自治体管理台帳への自動連携</a:t>
             </a:r>
             <a:endParaRPr lang="en-US" sz="1100" dirty="0"/>
           </a:p>
@@ -14840,7 +14986,7 @@
                 <a:ea typeface="Meiryo" pitchFamily="34" charset="-122"/>
                 <a:cs typeface="Meiryo" pitchFamily="34" charset="-120"/>
               </a:rPr>
-              <a:t>プロトタイプ（Streamlit／Anthropic API）。京都市・高島市で動作。画面はすべて実機。</a:t>
+              <a:t>プロトタイプ（Streamlit／Anthropic API）。京都市・高島市で動作。画面はプロトタイプの実画面、会話と判定の応答はモック（実APIは未検証）。</a:t>
             </a:r>
             <a:endParaRPr lang="en-US" sz="800" dirty="0"/>
           </a:p>

--- a/docs/deck3/nekonote_VORN2026.pptx
+++ b/docs/deck3/nekonote_VORN2026.pptx
@@ -3055,7 +3055,7 @@
                 <a:ea typeface="Meiryo" pitchFamily="34" charset="-122"/>
                 <a:cs typeface="Meiryo" pitchFamily="34" charset="-120"/>
               </a:rPr>
-              <a:t>町内会の同意を伝えると記録し、続けて「頭数が11頭（10頭以上）なので、同一世帯でない地域住民2名を含む京都市民3名以上が必要」と要綱第2条⑵の条件を返してから、活動者の入力へ進む。</a:t>
+              <a:t>この後、町内会の同意を伝えると記録し、続けて「頭数が11頭（10頭以上）なので、同一世帯でない地域住民2名を含む京都市民3名以上が必要」と要綱第2条⑵の条件を返してから、活動者の入力へ進む。</a:t>
             </a:r>
             <a:endParaRPr lang="en-US" sz="1100" dirty="0"/>
           </a:p>
@@ -4041,7 +4041,7 @@
                 <a:ea typeface="Meiryo" pitchFamily="34" charset="-122"/>
                 <a:cs typeface="Meiryo" pitchFamily="34" charset="-120"/>
               </a:rPr>
-              <a:t>左：第1号様式 まちねこ活動登録申請書（配布 touroku.docx）に転記した結果</a:t>
+              <a:t>左：第1号様式 まちねこ活動登録申請書（配布 touroku.docx）に転記した結果。掲載画面の転記（セル判定）の応答はモック。本番経路ではAIが行う設計だが実APIは未検証。</a:t>
             </a:r>
             <a:endParaRPr lang="en-US" sz="800" dirty="0"/>
           </a:p>
@@ -5705,7 +5705,7 @@
                           <a:ea typeface="Meiryo" pitchFamily="34" charset="-122"/>
                           <a:cs typeface="Meiryo" pitchFamily="34" charset="-120"/>
                         </a:rPr>
-                        <a:t>自治体管理台帳への自動連携</a:t>
+                        <a:t>行政台帳へデータが蓄積され確実に引き継がれる</a:t>
                       </a:r>
                       <a:endParaRPr lang="en-US" sz="1250" dirty="0">
                         <a:latin typeface="Meiryo" charset="0"/>
@@ -6268,7 +6268,7 @@
                 <a:ea typeface="Meiryo" pitchFamily="34" charset="-122"/>
                 <a:cs typeface="Meiryo" pitchFamily="34" charset="-120"/>
               </a:rPr>
-              <a:t>画面はプロトタイプ（高島市プロファイル）。出典：高島市 環境政策課ページ／どうぶつ基金 チケットFAQ・登録規約</a:t>
+              <a:t>画面はプロトタイプ（高島市プロファイル）。掲載画面の規則・受付期間の抽出の応答はモック。本番経路ではAIが行う設計だが実APIは未検証。出典：高島市 環境政策課ページ／どうぶつ基金 チケットFAQ・登録規約</a:t>
             </a:r>
             <a:endParaRPr lang="en-US" sz="800" dirty="0"/>
           </a:p>
@@ -7370,7 +7370,7 @@
                 <a:ea typeface="Meiryo" pitchFamily="34" charset="-122"/>
                 <a:cs typeface="Meiryo" pitchFamily="34" charset="-120"/>
               </a:rPr>
-              <a:t>チーム シーサーズ</a:t>
+              <a:t>技術構成</a:t>
             </a:r>
             <a:endParaRPr lang="en-US" sz="1500" dirty="0"/>
           </a:p>
@@ -13034,7 +13034,7 @@
                 <a:ea typeface="Meiryo" pitchFamily="34" charset="-122"/>
                 <a:cs typeface="Meiryo" pitchFamily="34" charset="-120"/>
               </a:rPr>
-              <a:t>1自治体あたりの担い手は数十〜数百人規模にとどまる一方、協働自治体は298にのぼり、要綱はすべて異なる。汎用ツールが存在しないため、現場では電話、LINE、Excel、紙によるアナログな手作業が続いている。</a:t>
+              <a:t>1自治体あたりの担い手は数十〜数百人規模（推定）にとどまる一方、協働自治体は298にのぼり、要綱は自治体ごとに異なる。私たちが調べた範囲では汎用ツールが存在しないため、現場では電話、LINE、Excel、紙によるアナログな手作業が続いている。</a:t>
             </a:r>
             <a:endParaRPr lang="en-US" sz="1300" dirty="0"/>
           </a:p>
@@ -13520,7 +13520,7 @@
                 <a:ea typeface="Meiryo" pitchFamily="34" charset="-122"/>
                 <a:cs typeface="Meiryo" pitchFamily="34" charset="-120"/>
               </a:rPr>
-              <a:t>持込頭数と時期が読めない。</a:t>
+              <a:t>持込頭数と時期が読めない（推定）。</a:t>
             </a:r>
             <a:endParaRPr lang="en-US" sz="1200" dirty="0"/>
           </a:p>
@@ -14815,7 +14815,7 @@
                 <a:ea typeface="Meiryo" pitchFamily="34" charset="-122"/>
                 <a:cs typeface="Meiryo" pitchFamily="34" charset="-120"/>
               </a:rPr>
-              <a:t>自治体管理台帳への自動連携</a:t>
+              <a:t>台帳への自動反映</a:t>
             </a:r>
             <a:endParaRPr lang="en-US" sz="1100" dirty="0"/>
           </a:p>

--- a/docs/deck3/nekonote_VORN2026.pptx
+++ b/docs/deck3/nekonote_VORN2026.pptx
@@ -3055,7 +3055,7 @@
                 <a:ea typeface="Meiryo" pitchFamily="34" charset="-122"/>
                 <a:cs typeface="Meiryo" pitchFamily="34" charset="-120"/>
               </a:rPr>
-              <a:t>この後、町内会の同意を伝えると記録し、続けて「頭数が11頭（10頭以上）なので、同一世帯でない地域住民2名を含む京都市民3名以上が必要」と要綱第2条⑵の条件を返してから、活動者の入力へ進む。</a:t>
+              <a:t>3往復目で、活動者3名の氏名・住所・役割・電話と「地域住民か・京都市民か」を求めてくる。頭数11頭に対する第2条⑵の人数要件（地域住民2名を含む京都市民3名以上）は、次頁の照合で判定する。</a:t>
             </a:r>
             <a:endParaRPr lang="en-US" sz="1100" dirty="0"/>
           </a:p>
@@ -3165,7 +3165,7 @@
                 <a:ea typeface="Meiryo" pitchFamily="34" charset="-122"/>
                 <a:cs typeface="Meiryo" pitchFamily="34" charset="-120"/>
               </a:rPr>
-              <a:t>画面はプロトタイプ。デモ用の架空コロニー（左京区・11頭・活動者3名）。会話の応答はモック。</a:t>
+              <a:t>画面はプロトタイプ。デモ用の架空コロニー（左京区・11頭・活動者3名）。会話は deepseek-chat の実応答。</a:t>
             </a:r>
             <a:endParaRPr lang="en-US" sz="800" dirty="0"/>
           </a:p>
@@ -3366,7 +3366,7 @@
                 <a:ea typeface="Meiryo" pitchFamily="34" charset="-122"/>
                 <a:cs typeface="Meiryo" pitchFamily="34" charset="-120"/>
               </a:rPr>
-              <a:t>判定。「周辺地図は別途添付」は要綱第5条、「登録後に第4号様式」は第9条から。規則ごとに出典と引用が付く。</a:t>
+              <a:t>判定（不足0件・注意4件）。周辺地図の添付は要綱第5条、未手術9頭の計画は申請書裏面⑷から。R2は「11頭で10頭以上のため京都市民3人以上」を第2条⑵から判定してOK。規則ごとに出典と引用が付く。</a:t>
             </a:r>
             <a:endParaRPr lang="en-US" sz="950" dirty="0"/>
           </a:p>
@@ -3638,7 +3638,7 @@
                 <a:ea typeface="Meiryo" pitchFamily="34" charset="-122"/>
                 <a:cs typeface="Meiryo" pitchFamily="34" charset="-120"/>
               </a:rPr>
-              <a:t>画面はプロトタイプ（京都市プロファイル）。判定の応答はモック。本番経路では規則を要綱から毎回抽出する設計で、コードに規則を持たない。</a:t>
+              <a:t>画面はプロトタイプ（京都市プロファイル）。規則抽出33件と判定は deepseek-chat の実応答。規則は要綱から毎回抽出し、コードに規則を持たない。</a:t>
             </a:r>
             <a:endParaRPr lang="en-US" sz="800" dirty="0"/>
           </a:p>
@@ -4041,7 +4041,7 @@
                 <a:ea typeface="Meiryo" pitchFamily="34" charset="-122"/>
                 <a:cs typeface="Meiryo" pitchFamily="34" charset="-120"/>
               </a:rPr>
-              <a:t>左：第1号様式 まちねこ活動登録申請書（配布 touroku.docx）に転記した結果。掲載画面の転記（セル判定）の応答はモック。本番経路ではAIが行う設計だが実APIは未検証。</a:t>
+              <a:t>左：第1号様式 まちねこ活動登録申請書（配布 touroku.docx）に deepseek-chat の応答（14セル）で転記した DOCX を HTML で再現表示（Word 画面ではない）。町内会代表者の住所・電話・実施者は聞き取りで未入力のため空欄。</a:t>
             </a:r>
             <a:endParaRPr lang="en-US" sz="800" dirty="0"/>
           </a:p>
@@ -6158,7 +6158,7 @@
                 <a:ea typeface="Meiryo" pitchFamily="34" charset="-122"/>
                 <a:cs typeface="Meiryo" pitchFamily="34" charset="-120"/>
               </a:rPr>
-              <a:t>高島市の資料から抽出した規則に照らした判定。受付の値は市HP本文から抽出。交付要綱PDFは未取得。</a:t>
+              <a:t>高島市の資料から抽出した規則に照らした判定。聞き取りを3往復で止めた状態のため、申請者区分などが未回答で不足7件。受付の値は市HP本文から抽出。交付要綱PDFは未取得。</a:t>
             </a:r>
             <a:endParaRPr lang="en-US" sz="950" dirty="0"/>
           </a:p>
@@ -6268,7 +6268,7 @@
                 <a:ea typeface="Meiryo" pitchFamily="34" charset="-122"/>
                 <a:cs typeface="Meiryo" pitchFamily="34" charset="-120"/>
               </a:rPr>
-              <a:t>画面はプロトタイプ（高島市プロファイル）。掲載画面の規則・受付期間の抽出の応答はモック。本番経路ではAIが行う設計だが実APIは未検証。出典：高島市 環境政策課ページ／どうぶつ基金 チケットFAQ・登録規約</a:t>
+              <a:t>画面はプロトタイプ（高島市プロファイル）。規則抽出27件・判定・受付期間の抽出は deepseek-chat の実応答。出典：高島市 環境政策課ページ／どうぶつ基金 チケットFAQ・登録規約</a:t>
             </a:r>
             <a:endParaRPr lang="en-US" sz="800" dirty="0"/>
           </a:p>
@@ -7301,7 +7301,7 @@
                 <a:ea typeface="Meiryo" pitchFamily="34" charset="-122"/>
                 <a:cs typeface="Meiryo" pitchFamily="34" charset="-120"/>
               </a:rPr>
-              <a:t>審査通過後にセンター・基金への当事者ヒアリングを実施予定／高島市要綱PDFの取得と検証／API応答精度の検証を継続中（掲載画面はモック応答による検証環境で撮影）</a:t>
+              <a:t>審査通過後にセンター・基金への当事者ヒアリングを実施予定／高島市要綱PDFの取得と検証／LLM応答の安定化（JSONモードで空応答が返る場合の再試行、聞き取りの取りこぼし）を継続中</a:t>
             </a:r>
             <a:endParaRPr lang="en-US" sz="1200" dirty="0"/>
           </a:p>
@@ -7412,7 +7412,7 @@
                 <a:ea typeface="Meiryo" pitchFamily="34" charset="-122"/>
                 <a:cs typeface="Meiryo" pitchFamily="34" charset="-120"/>
               </a:rPr>
-              <a:t>技術構成：Python／Streamlit／Anthropic API（Claude）／python-docx。京都市・高島市の2プロファイルで動作。要綱の規則はコードに書かず、資料フォルダから毎回抽出。日付の計算だけコード側。</a:t>
+              <a:t>Python／Streamlit／python-docx。LLM は OpenAI 互換 API（掲載画面は DeepSeek deepseek-chat で実行）と Anthropic API を切替可。京都市・高島市の2プロファイルで動作。要綱の規則はコードに書かず、資料フォルダから毎回抽出。日付の計算だけコード側。</a:t>
             </a:r>
             <a:endParaRPr lang="en-US" sz="1200" dirty="0"/>
           </a:p>
@@ -14986,7 +14986,7 @@
                 <a:ea typeface="Meiryo" pitchFamily="34" charset="-122"/>
                 <a:cs typeface="Meiryo" pitchFamily="34" charset="-120"/>
               </a:rPr>
-              <a:t>プロトタイプ（Streamlit／Anthropic API）。京都市・高島市で動作。画面はプロトタイプの実画面、会話と判定の応答はモック（実APIは未検証）。</a:t>
+              <a:t>プロトタイプ（Streamlit／DeepSeek API）。京都市・高島市で動作。画面はプロトタイプの実画面。会話・判定・転記は deepseek-chat の実応答。</a:t>
             </a:r>
             <a:endParaRPr lang="en-US" sz="800" dirty="0"/>
           </a:p>
